--- a/3-Master_Plan/re_entry/HEROs_and_PASSes/slides/auto/CHAR_intro_characterization_AUTO.pptx
+++ b/3-Master_Plan/re_entry/HEROs_and_PASSes/slides/auto/CHAR_intro_characterization_AUTO.pptx
@@ -3175,7 +3175,7 @@
                 <a:gridCol w="1625803"/>
                 <a:gridCol w="3367735"/>
               </a:tblGrid>
-              <a:tr h="566928">
+              <a:tr h="510235">
                 <a:tc>
                   <a:txBody>
                     <a:bodyPr wrap="square" lIns="50800" rIns="50800" tIns="25400" bIns="25400"/>
@@ -3240,7 +3240,7 @@
                   </a:tcPr>
                 </a:tc>
               </a:tr>
-              <a:tr h="566928">
+              <a:tr h="510235">
                 <a:tc>
                   <a:txBody>
                     <a:bodyPr wrap="square" lIns="50800" rIns="50800" tIns="25400" bIns="25400"/>
@@ -3297,7 +3297,7 @@
                   <a:tcPr anchor="ctr"/>
                 </a:tc>
               </a:tr>
-              <a:tr h="566928">
+              <a:tr h="510235">
                 <a:tc>
                   <a:txBody>
                     <a:bodyPr wrap="square" lIns="50800" rIns="50800" tIns="25400" bIns="25400"/>
@@ -3313,7 +3313,7 @@
                         <a:rPr sz="800" i="1" baseline="-25000">
                           <a:latin typeface="Cambria Math"/>
                         </a:rPr>
-                        <a:t>j</a:t>
+                        <a:t>j^*</a:t>
                       </a:r>
                     </a:p>
                   </a:txBody>
@@ -3330,7 +3330,7 @@
                         </a:defRPr>
                       </a:pPr>
                       <a:r>
-                        <a:t>Team talent target</a:t>
+                        <a:t>Sim assignment target</a:t>
                       </a:r>
                     </a:p>
                   </a:txBody>
@@ -3347,14 +3347,14 @@
                         </a:defRPr>
                       </a:pPr>
                       <a:r>
-                        <a:t>Synthetic iid Uniform[0,1] per team (`draw_target_means`); not real NCAA schools</a:t>
+                        <a:t>Synthetic iid Uniform[0,1] per team (`draw_target_means`); soft-assign attractor — not realized roster talent</a:t>
                       </a:r>
                     </a:p>
                   </a:txBody>
                   <a:tcPr anchor="ctr"/>
                 </a:tc>
               </a:tr>
-              <a:tr h="566928">
+              <a:tr h="510235">
                 <a:tc>
                   <a:txBody>
                     <a:bodyPr wrap="square" lIns="50800" rIns="50800" tIns="25400" bIns="25400"/>
@@ -3364,7 +3364,13 @@
                         <a:rPr sz="900" i="1">
                           <a:latin typeface="Cambria Math"/>
                         </a:rPr>
-                        <a:t>ρ</a:t>
+                        <a:t>T</a:t>
+                      </a:r>
+                      <a:r>
+                        <a:rPr sz="800" i="1" baseline="-25000">
+                          <a:latin typeface="Cambria Math"/>
+                        </a:rPr>
+                        <a:t>j</a:t>
                       </a:r>
                     </a:p>
                   </a:txBody>
@@ -3381,7 +3387,7 @@
                         </a:defRPr>
                       </a:pPr>
                       <a:r>
-                        <a:t>Assignment assortativity</a:t>
+                        <a:t>Realized team talent</a:t>
                       </a:r>
                     </a:p>
                   </a:txBody>
@@ -3394,17 +3400,33 @@
                     <a:p>
                       <a:r>
                         <a:rPr sz="800"/>
-                        <a:t>Soft match strength: players </a:t>
+                        <a:t>Mean </a:t>
                       </a:r>
                       <a:r>
                         <a:rPr sz="800" i="1">
                           <a:latin typeface="Cambria Math"/>
                         </a:rPr>
-                        <a:t>\to</a:t>
+                        <a:t>A</a:t>
+                      </a:r>
+                      <a:r>
+                        <a:rPr sz="800" i="1" baseline="-25000">
+                          <a:latin typeface="Cambria Math"/>
+                        </a:rPr>
+                        <a:t>i</a:t>
                       </a:r>
                       <a:r>
                         <a:rPr sz="800"/>
-                        <a:t> teams with </a:t>
+                        <a:t> on team </a:t>
+                      </a:r>
+                      <a:r>
+                        <a:rPr sz="800" i="1">
+                          <a:latin typeface="Cambria Math"/>
+                        </a:rPr>
+                        <a:t>j</a:t>
+                      </a:r>
+                      <a:r>
+                        <a:rPr sz="800"/>
+                        <a:t>'s roster after ASSIGN; empirical </a:t>
                       </a:r>
                       <a:r>
                         <a:rPr sz="800" i="1">
@@ -3416,13 +3438,17 @@
                         <a:rPr sz="800" i="1" baseline="-25000">
                           <a:latin typeface="Cambria Math"/>
                         </a:rPr>
-                        <a:t>j</a:t>
+                        <a:t>jt</a:t>
+                      </a:r>
+                      <a:r>
+                        <a:rPr sz="800"/>
+                        <a:t> from </a:t>
                       </a:r>
                       <a:r>
                         <a:rPr sz="800" i="1">
                           <a:latin typeface="Cambria Math"/>
                         </a:rPr>
-                        <a:t> \approx A</a:t>
+                        <a:t>\hat{A}</a:t>
                       </a:r>
                       <a:r>
                         <a:rPr sz="800" i="1" baseline="-25000">
@@ -3435,7 +3461,7 @@
                   <a:tcPr anchor="ctr"/>
                 </a:tc>
               </a:tr>
-              <a:tr h="566928">
+              <a:tr h="510235">
                 <a:tc>
                   <a:txBody>
                     <a:bodyPr wrap="square" lIns="50800" rIns="50800" tIns="25400" bIns="25400"/>
@@ -3445,13 +3471,7 @@
                         <a:rPr sz="900" i="1">
                           <a:latin typeface="Cambria Math"/>
                         </a:rPr>
-                        <a:t>L</a:t>
-                      </a:r>
-                      <a:r>
-                        <a:rPr sz="800" i="1" baseline="-25000">
-                          <a:latin typeface="Cambria Math"/>
-                        </a:rPr>
-                        <a:t>C</a:t>
+                        <a:t>ρ</a:t>
                       </a:r>
                     </a:p>
                   </a:txBody>
@@ -3468,7 +3488,7 @@
                         </a:defRPr>
                       </a:pPr>
                       <a:r>
-                        <a:t>Congestion measure</a:t>
+                        <a:t>Assignment assortativity</a:t>
                       </a:r>
                     </a:p>
                   </a:txBody>
@@ -3481,46 +3501,48 @@
                     <a:p>
                       <a:r>
                         <a:rPr sz="800"/>
-                        <a:t>LOO peer viability — deck uses smooth </a:t>
+                        <a:t>Soft match strength: players </a:t>
                       </a:r>
                       <a:r>
                         <a:rPr sz="800" i="1">
                           <a:latin typeface="Cambria Math"/>
                         </a:rPr>
-                        <a:t>σ</a:t>
+                        <a:t>\to</a:t>
                       </a:r>
                       <a:r>
                         <a:rPr sz="800"/>
-                        <a:t>; code also has hard share (</a:t>
+                        <a:t> teams with </a:t>
                       </a:r>
                       <a:r>
                         <a:rPr sz="800" i="1">
                           <a:latin typeface="Cambria Math"/>
                         </a:rPr>
-                        <a:t>A</a:t>
+                        <a:t>T</a:t>
                       </a:r>
                       <a:r>
                         <a:rPr sz="800" i="1" baseline="-25000">
                           <a:latin typeface="Cambria Math"/>
                         </a:rPr>
-                        <a:t>j</a:t>
+                        <a:t>j^*</a:t>
                       </a:r>
                       <a:r>
                         <a:rPr sz="800" i="1">
                           <a:latin typeface="Cambria Math"/>
                         </a:rPr>
-                        <a:t>&gt;\theta</a:t>
-                      </a:r>
-                      <a:r>
-                        <a:rPr sz="800"/>
-                        <a:t>)</a:t>
+                        <a:t> ≈ A</a:t>
+                      </a:r>
+                      <a:r>
+                        <a:rPr sz="800" i="1" baseline="-25000">
+                          <a:latin typeface="Cambria Math"/>
+                        </a:rPr>
+                        <a:t>i</a:t>
                       </a:r>
                     </a:p>
                   </a:txBody>
                   <a:tcPr anchor="ctr"/>
                 </a:tc>
               </a:tr>
-              <a:tr h="566928">
+              <a:tr h="510235">
                 <a:tc>
                   <a:txBody>
                     <a:bodyPr wrap="square" lIns="50800" rIns="50800" tIns="25400" bIns="25400"/>
@@ -3530,7 +3552,13 @@
                         <a:rPr sz="900" i="1">
                           <a:latin typeface="Cambria Math"/>
                         </a:rPr>
-                        <a:t>λ</a:t>
+                        <a:t>L</a:t>
+                      </a:r>
+                      <a:r>
+                        <a:rPr sz="800" i="1" baseline="-25000">
+                          <a:latin typeface="Cambria Math"/>
+                        </a:rPr>
+                        <a:t>C</a:t>
                       </a:r>
                     </a:p>
                   </a:txBody>
@@ -3547,7 +3575,7 @@
                         </a:defRPr>
                       </a:pPr>
                       <a:r>
-                        <a:t>Congestion weight in score</a:t>
+                        <a:t>Congestion measure</a:t>
                       </a:r>
                     </a:p>
                   </a:txBody>
@@ -3560,30 +3588,46 @@
                     <a:p>
                       <a:r>
                         <a:rPr sz="800"/>
-                        <a:t>How hard </a:t>
+                        <a:t>LOO peer viability — deck uses smooth </a:t>
                       </a:r>
                       <a:r>
                         <a:rPr sz="800" i="1">
                           <a:latin typeface="Cambria Math"/>
                         </a:rPr>
-                        <a:t>L</a:t>
+                        <a:t>σ</a:t>
+                      </a:r>
+                      <a:r>
+                        <a:rPr sz="800"/>
+                        <a:t>; code also has hard share (</a:t>
+                      </a:r>
+                      <a:r>
+                        <a:rPr sz="800" i="1">
+                          <a:latin typeface="Cambria Math"/>
+                        </a:rPr>
+                        <a:t>A</a:t>
                       </a:r>
                       <a:r>
                         <a:rPr sz="800" i="1" baseline="-25000">
                           <a:latin typeface="Cambria Math"/>
                         </a:rPr>
-                        <a:t>C</a:t>
+                        <a:t>j</a:t>
+                      </a:r>
+                      <a:r>
+                        <a:rPr sz="800" i="1">
+                          <a:latin typeface="Cambria Math"/>
+                        </a:rPr>
+                        <a:t>&gt;\theta</a:t>
                       </a:r>
                       <a:r>
                         <a:rPr sz="800"/>
-                        <a:t> penalizes ranking — not congestion itself</a:t>
+                        <a:t>)</a:t>
                       </a:r>
                     </a:p>
                   </a:txBody>
                   <a:tcPr anchor="ctr"/>
                 </a:tc>
               </a:tr>
-              <a:tr h="566928">
+              <a:tr h="510235">
                 <a:tc>
                   <a:txBody>
                     <a:bodyPr wrap="square" lIns="50800" rIns="50800" tIns="25400" bIns="25400"/>
@@ -3593,7 +3637,7 @@
                         <a:rPr sz="900" i="1">
                           <a:latin typeface="Cambria Math"/>
                         </a:rPr>
-                        <a:t>\theta</a:t>
+                        <a:t>λ</a:t>
                       </a:r>
                     </a:p>
                   </a:txBody>
@@ -3610,6 +3654,69 @@
                         </a:defRPr>
                       </a:pPr>
                       <a:r>
+                        <a:t>Congestion weight in score</a:t>
+                      </a:r>
+                    </a:p>
+                  </a:txBody>
+                  <a:tcPr anchor="ctr"/>
+                </a:tc>
+                <a:tc>
+                  <a:txBody>
+                    <a:bodyPr wrap="square" lIns="50800" rIns="50800" tIns="25400" bIns="25400"/>
+                    <a:lstStyle/>
+                    <a:p>
+                      <a:r>
+                        <a:rPr sz="800"/>
+                        <a:t>How hard </a:t>
+                      </a:r>
+                      <a:r>
+                        <a:rPr sz="800" i="1">
+                          <a:latin typeface="Cambria Math"/>
+                        </a:rPr>
+                        <a:t>L</a:t>
+                      </a:r>
+                      <a:r>
+                        <a:rPr sz="800" i="1" baseline="-25000">
+                          <a:latin typeface="Cambria Math"/>
+                        </a:rPr>
+                        <a:t>C</a:t>
+                      </a:r>
+                      <a:r>
+                        <a:rPr sz="800"/>
+                        <a:t> penalizes ranking — not congestion itself</a:t>
+                      </a:r>
+                    </a:p>
+                  </a:txBody>
+                  <a:tcPr anchor="ctr"/>
+                </a:tc>
+              </a:tr>
+              <a:tr h="510235">
+                <a:tc>
+                  <a:txBody>
+                    <a:bodyPr wrap="square" lIns="50800" rIns="50800" tIns="25400" bIns="25400"/>
+                    <a:lstStyle/>
+                    <a:p>
+                      <a:r>
+                        <a:rPr sz="900" i="1">
+                          <a:latin typeface="Cambria Math"/>
+                        </a:rPr>
+                        <a:t>\theta</a:t>
+                      </a:r>
+                    </a:p>
+                  </a:txBody>
+                  <a:tcPr anchor="ctr"/>
+                </a:tc>
+                <a:tc>
+                  <a:txBody>
+                    <a:bodyPr wrap="square" lIns="50800" rIns="50800" tIns="25400" bIns="25400"/>
+                    <a:lstStyle/>
+                    <a:p>
+                      <a:pPr>
+                        <a:defRPr sz="900">
+                          <a:latin typeface="Calibri"/>
+                        </a:defRPr>
+                      </a:pPr>
+                      <a:r>
                         <a:t>Viability cutline</a:t>
                       </a:r>
                     </a:p>
@@ -3634,7 +3741,7 @@
                   <a:tcPr anchor="ctr"/>
                 </a:tc>
               </a:tr>
-              <a:tr h="566928">
+              <a:tr h="510235">
                 <a:tc>
                   <a:txBody>
                     <a:bodyPr wrap="square" lIns="50800" rIns="50800" tIns="25400" bIns="25400"/>
@@ -3687,7 +3794,7 @@
                   <a:tcPr anchor="ctr"/>
                 </a:tc>
               </a:tr>
-              <a:tr h="566928">
+              <a:tr h="510237">
                 <a:tc>
                   <a:txBody>
                     <a:bodyPr wrap="square" lIns="50800" rIns="50800" tIns="25400" bIns="25400"/>
@@ -4005,7 +4112,7 @@
               <a:rPr sz="800" i="1" baseline="-25000">
                 <a:latin typeface="Cambria Math"/>
               </a:rPr>
-              <a:t>j</a:t>
+              <a:t>j^*</a:t>
             </a:r>
             <a:r>
               <a:rPr sz="900"/>
@@ -4145,11 +4252,11 @@
               <a:rPr sz="800" i="1" baseline="-25000">
                 <a:latin typeface="Cambria Math"/>
               </a:rPr>
-              <a:t>j</a:t>
+              <a:t>j^*</a:t>
             </a:r>
             <a:r>
               <a:rPr sz="900"/>
-              <a:t>: Uniform[0,1] iid per team — \texttt{draw\_target\_means}; synthetic ideal seats, not NCAA roster data</a:t>
+              <a:t>: Uniform[0,1] iid per team — \texttt{draw\_target\_means}; synthetic assignment targets, not NCAA roster data</a:t>
             </a:r>
           </a:p>
           <a:p>
@@ -4165,11 +4272,27 @@
               <a:rPr sz="900" i="1">
                 <a:latin typeface="Cambria Math"/>
               </a:rPr>
-              <a:t>λ=0.55</a:t>
+              <a:t>T</a:t>
+            </a:r>
+            <a:r>
+              <a:rPr sz="800" i="1" baseline="-25000">
+                <a:latin typeface="Cambria Math"/>
+              </a:rPr>
+              <a:t>j</a:t>
             </a:r>
             <a:r>
               <a:rPr sz="900"/>
-              <a:t> — \texttt{tier1\_539\_reference\_settings.json} / playground default</a:t>
+              <a:t>: realized roster mean after ASSIGN — not drawn; Sketch A 2D </a:t>
+            </a:r>
+            <a:r>
+              <a:rPr sz="900" i="1">
+                <a:latin typeface="Cambria Math"/>
+              </a:rPr>
+              <a:t>y</a:t>
+            </a:r>
+            <a:r>
+              <a:rPr sz="900"/>
+              <a:t>-axis</a:t>
             </a:r>
           </a:p>
           <a:p>
@@ -4185,21 +4308,11 @@
               <a:rPr sz="900" i="1">
                 <a:latin typeface="Cambria Math"/>
               </a:rPr>
-              <a:t>\theta=0.72</a:t>
+              <a:t>λ=0.55</a:t>
             </a:r>
             <a:r>
               <a:rPr sz="900"/>
-              <a:t>, </a:t>
-            </a:r>
-            <a:r>
-              <a:rPr sz="900" i="1">
-                <a:latin typeface="Cambria Math"/>
-              </a:rPr>
-              <a:t>\gamma=10</a:t>
-            </a:r>
-            <a:r>
-              <a:rPr sz="900"/>
-              <a:t> — same 539 reference JSON</a:t>
+              <a:t> — \texttt{tier1\_539\_reference\_settings.json} / playground default</a:t>
             </a:r>
           </a:p>
           <a:p>
@@ -4215,31 +4328,21 @@
               <a:rPr sz="900" i="1">
                 <a:latin typeface="Cambria Math"/>
               </a:rPr>
-              <a:t>ρ=8</a:t>
+              <a:t>\theta=0.72</a:t>
             </a:r>
             <a:r>
               <a:rPr sz="900"/>
-              <a:t> — gallery fixed assign for </a:t>
+              <a:t>, </a:t>
             </a:r>
             <a:r>
               <a:rPr sz="900" i="1">
                 <a:latin typeface="Cambria Math"/>
               </a:rPr>
-              <a:t>λ</a:t>
+              <a:t>\gamma=10</a:t>
             </a:r>
             <a:r>
               <a:rPr sz="900"/>
-              <a:t> / </a:t>
-            </a:r>
-            <a:r>
-              <a:rPr sz="900" i="1">
-                <a:latin typeface="Cambria Math"/>
-              </a:rPr>
-              <a:t>\theta</a:t>
-            </a:r>
-            <a:r>
-              <a:rPr sz="900"/>
-              <a:t> slides (moderate-high mixing; not a 539 JSON field)</a:t>
+              <a:t> — same 539 reference JSON</a:t>
             </a:r>
           </a:p>
           <a:p>
@@ -4255,17 +4358,57 @@
               <a:rPr sz="900" i="1">
                 <a:latin typeface="Cambria Math"/>
               </a:rPr>
-              <a:t>K/N=10%</a:t>
+              <a:t>ρ=8</a:t>
             </a:r>
             <a:r>
               <a:rPr sz="900"/>
-              <a:t> — characterization default (MBB draft </a:t>
+              <a:t> — gallery fixed assign for </a:t>
             </a:r>
             <a:r>
               <a:rPr sz="900" i="1">
                 <a:latin typeface="Cambria Math"/>
               </a:rPr>
-              <a:t>\approx</a:t>
+              <a:t>λ</a:t>
+            </a:r>
+            <a:r>
+              <a:rPr sz="900"/>
+              <a:t> / </a:t>
+            </a:r>
+            <a:r>
+              <a:rPr sz="900" i="1">
+                <a:latin typeface="Cambria Math"/>
+              </a:rPr>
+              <a:t>\theta</a:t>
+            </a:r>
+            <a:r>
+              <a:rPr sz="900"/>
+              <a:t> slides (moderate-high mixing; not a 539 JSON field)</a:t>
+            </a:r>
+          </a:p>
+          <a:p>
+            <a:pPr>
+              <a:spcBef>
+                <a:spcPts val="0"/>
+              </a:spcBef>
+              <a:spcAft>
+                <a:spcPts val="0"/>
+              </a:spcAft>
+            </a:pPr>
+            <a:r>
+              <a:rPr sz="900" i="1">
+                <a:latin typeface="Cambria Math"/>
+              </a:rPr>
+              <a:t>K/N=10%</a:t>
+            </a:r>
+            <a:r>
+              <a:rPr sz="900"/>
+              <a:t> — characterization default (MBB draft </a:t>
+            </a:r>
+            <a:r>
+              <a:rPr sz="900" i="1">
+                <a:latin typeface="Cambria Math"/>
+              </a:rPr>
+              <a:t>≈</a:t>
             </a:r>
             <a:r>
               <a:rPr sz="900"/>

--- a/3-Master_Plan/re_entry/HEROs_and_PASSes/slides/auto/CHAR_intro_characterization_AUTO.pptx
+++ b/3-Master_Plan/re_entry/HEROs_and_PASSes/slides/auto/CHAR_intro_characterization_AUTO.pptx
@@ -3110,11 +3110,10 @@
           </a:bodyPr>
           <a:lstStyle/>
           <a:p>
-            <a:pPr>
-              <a:defRPr b="1"/>
-            </a:pPr>
-            <a:r>
-              <a:rPr sz="2000"/>
+            <a:r>
+              <a:rPr sz="2000" b="1" i="0" baseline="0">
+                <a:latin typeface="Calibri"/>
+              </a:rPr>
               <a:t>Phase B — Fake-league characterization (not curve fitting)</a:t>
             </a:r>
           </a:p>
@@ -3142,11 +3141,10 @@
           </a:bodyPr>
           <a:lstStyle/>
           <a:p>
-            <a:pPr>
-              <a:defRPr b="1"/>
-            </a:pPr>
-            <a:r>
-              <a:rPr sz="1200"/>
+            <a:r>
+              <a:rPr sz="1200" b="1" i="0" baseline="0">
+                <a:latin typeface="Calibri"/>
+              </a:rPr>
               <a:t>Knobs (mini glossary)</a:t>
             </a:r>
           </a:p>
@@ -3162,7 +3160,7 @@
         </p:nvGraphicFramePr>
         <p:xfrm>
           <a:off x="384048" y="1024128"/>
-          <a:ext cx="5806439" cy="5102352"/>
+          <a:ext cx="5806439" cy="5065776"/>
         </p:xfrm>
         <a:graphic>
           <a:graphicData uri="http://schemas.openxmlformats.org/drawingml/2006/table">
@@ -3175,18 +3173,16 @@
                 <a:gridCol w="1625803"/>
                 <a:gridCol w="3367735"/>
               </a:tblGrid>
-              <a:tr h="510235">
+              <a:tr h="506577">
                 <a:tc>
                   <a:txBody>
                     <a:bodyPr wrap="square" lIns="50800" rIns="50800" tIns="25400" bIns="25400"/>
                     <a:lstStyle/>
                     <a:p>
-                      <a:pPr>
-                        <a:defRPr sz="900" b="1">
+                      <a:r>
+                        <a:rPr sz="900" b="1" i="0" baseline="0">
                           <a:latin typeface="Calibri"/>
-                        </a:defRPr>
-                      </a:pPr>
-                      <a:r>
+                        </a:rPr>
                         <a:t>Symbol</a:t>
                       </a:r>
                     </a:p>
@@ -3202,12 +3198,10 @@
                     <a:bodyPr wrap="square" lIns="50800" rIns="50800" tIns="25400" bIns="25400"/>
                     <a:lstStyle/>
                     <a:p>
-                      <a:pPr>
-                        <a:defRPr sz="900" b="1">
+                      <a:r>
+                        <a:rPr sz="900" b="1" i="0" baseline="0">
                           <a:latin typeface="Calibri"/>
-                        </a:defRPr>
-                      </a:pPr>
-                      <a:r>
+                        </a:rPr>
                         <a:t>Plain name</a:t>
                       </a:r>
                     </a:p>
@@ -3223,12 +3217,10 @@
                     <a:bodyPr wrap="square" lIns="50800" rIns="50800" tIns="25400" bIns="25400"/>
                     <a:lstStyle/>
                     <a:p>
-                      <a:pPr>
-                        <a:defRPr sz="900" b="1">
+                      <a:r>
+                        <a:rPr sz="900" b="1" i="0" baseline="0">
                           <a:latin typeface="Calibri"/>
-                        </a:defRPr>
-                      </a:pPr>
-                      <a:r>
+                        </a:rPr>
                         <a:t>What it controls</a:t>
                       </a:r>
                     </a:p>
@@ -3240,23 +3232,17 @@
                   </a:tcPr>
                 </a:tc>
               </a:tr>
-              <a:tr h="510235">
+              <a:tr h="506577">
                 <a:tc>
                   <a:txBody>
                     <a:bodyPr wrap="square" lIns="50800" rIns="50800" tIns="25400" bIns="25400"/>
                     <a:lstStyle/>
                     <a:p>
                       <a:r>
-                        <a:rPr sz="900" i="1">
-                          <a:latin typeface="Cambria Math"/>
+                        <a:rPr sz="900" b="0" i="0" baseline="0">
+                          <a:latin typeface="Calibri"/>
                         </a:rPr>
-                        <a:t>A</a:t>
-                      </a:r>
-                      <a:r>
-                        <a:rPr sz="800" i="1" baseline="-25000">
-                          <a:latin typeface="Cambria Math"/>
-                        </a:rPr>
-                        <a:t>i</a:t>
+                        <a:t>A_{i}</a:t>
                       </a:r>
                     </a:p>
                   </a:txBody>
@@ -3267,12 +3253,10 @@
                     <a:bodyPr wrap="square" lIns="50800" rIns="50800" tIns="25400" bIns="25400"/>
                     <a:lstStyle/>
                     <a:p>
-                      <a:pPr>
-                        <a:defRPr sz="900">
+                      <a:r>
+                        <a:rPr sz="900" b="0" i="0" baseline="0">
                           <a:latin typeface="Calibri"/>
-                        </a:defRPr>
-                      </a:pPr>
-                      <a:r>
+                        </a:rPr>
                         <a:t>Player ability</a:t>
                       </a:r>
                     </a:p>
@@ -3284,12 +3268,10 @@
                     <a:bodyPr wrap="square" lIns="50800" rIns="50800" tIns="25400" bIns="25400"/>
                     <a:lstStyle/>
                     <a:p>
-                      <a:pPr>
-                        <a:defRPr sz="800">
+                      <a:r>
+                        <a:rPr sz="800" b="0" i="0" baseline="0">
                           <a:latin typeface="Calibri"/>
-                        </a:defRPr>
-                      </a:pPr>
-                      <a:r>
+                        </a:rPr>
                         <a:t>Innate talent draw — Beta(2,2) on [0,1] (539 preset)</a:t>
                       </a:r>
                     </a:p>
@@ -3297,23 +3279,17 @@
                   <a:tcPr anchor="ctr"/>
                 </a:tc>
               </a:tr>
-              <a:tr h="510235">
+              <a:tr h="506577">
                 <a:tc>
                   <a:txBody>
                     <a:bodyPr wrap="square" lIns="50800" rIns="50800" tIns="25400" bIns="25400"/>
                     <a:lstStyle/>
                     <a:p>
                       <a:r>
-                        <a:rPr sz="900" i="1">
-                          <a:latin typeface="Cambria Math"/>
+                        <a:rPr sz="900" b="0" i="0" baseline="0">
+                          <a:latin typeface="Calibri"/>
                         </a:rPr>
-                        <a:t>T</a:t>
-                      </a:r>
-                      <a:r>
-                        <a:rPr sz="800" i="1" baseline="-25000">
-                          <a:latin typeface="Cambria Math"/>
-                        </a:rPr>
-                        <a:t>j^*</a:t>
+                        <a:t>T_{j^*}</a:t>
                       </a:r>
                     </a:p>
                   </a:txBody>
@@ -3324,12 +3300,10 @@
                     <a:bodyPr wrap="square" lIns="50800" rIns="50800" tIns="25400" bIns="25400"/>
                     <a:lstStyle/>
                     <a:p>
-                      <a:pPr>
-                        <a:defRPr sz="900">
+                      <a:r>
+                        <a:rPr sz="900" b="0" i="0" baseline="0">
                           <a:latin typeface="Calibri"/>
-                        </a:defRPr>
-                      </a:pPr>
-                      <a:r>
+                        </a:rPr>
                         <a:t>Sim assignment target</a:t>
                       </a:r>
                     </a:p>
@@ -3341,36 +3315,28 @@
                     <a:bodyPr wrap="square" lIns="50800" rIns="50800" tIns="25400" bIns="25400"/>
                     <a:lstStyle/>
                     <a:p>
-                      <a:pPr>
-                        <a:defRPr sz="800">
+                      <a:r>
+                        <a:rPr sz="800" b="0" i="0" baseline="0">
                           <a:latin typeface="Calibri"/>
-                        </a:defRPr>
-                      </a:pPr>
-                      <a:r>
-                        <a:t>Synthetic iid Uniform[0,1] per team (`draw_target_means`); soft-assign attractor — not realized roster talent</a:t>
+                        </a:rPr>
+                        <a:t>Synthetic iid Uniform[0,1] per team; soft-assign attractor — not realized roster talent</a:t>
                       </a:r>
                     </a:p>
                   </a:txBody>
                   <a:tcPr anchor="ctr"/>
                 </a:tc>
               </a:tr>
-              <a:tr h="510235">
+              <a:tr h="506577">
                 <a:tc>
                   <a:txBody>
                     <a:bodyPr wrap="square" lIns="50800" rIns="50800" tIns="25400" bIns="25400"/>
                     <a:lstStyle/>
                     <a:p>
                       <a:r>
-                        <a:rPr sz="900" i="1">
-                          <a:latin typeface="Cambria Math"/>
+                        <a:rPr sz="900" b="0" i="0" baseline="0">
+                          <a:latin typeface="Calibri"/>
                         </a:rPr>
-                        <a:t>T</a:t>
-                      </a:r>
-                      <a:r>
-                        <a:rPr sz="800" i="1" baseline="-25000">
-                          <a:latin typeface="Cambria Math"/>
-                        </a:rPr>
-                        <a:t>j</a:t>
+                        <a:t>T_{j}</a:t>
                       </a:r>
                     </a:p>
                   </a:txBody>
@@ -3381,12 +3347,10 @@
                     <a:bodyPr wrap="square" lIns="50800" rIns="50800" tIns="25400" bIns="25400"/>
                     <a:lstStyle/>
                     <a:p>
-                      <a:pPr>
-                        <a:defRPr sz="900">
+                      <a:r>
+                        <a:rPr sz="900" b="0" i="0" baseline="0">
                           <a:latin typeface="Calibri"/>
-                        </a:defRPr>
-                      </a:pPr>
-                      <a:r>
+                        </a:rPr>
                         <a:t>Realized team talent</a:t>
                       </a:r>
                     </a:p>
@@ -3399,79 +3363,27 @@
                     <a:lstStyle/>
                     <a:p>
                       <a:r>
-                        <a:rPr sz="800"/>
-                        <a:t>Mean </a:t>
-                      </a:r>
-                      <a:r>
-                        <a:rPr sz="800" i="1">
-                          <a:latin typeface="Cambria Math"/>
+                        <a:rPr sz="800" b="0" i="0" baseline="0">
+                          <a:latin typeface="Calibri"/>
                         </a:rPr>
-                        <a:t>A</a:t>
-                      </a:r>
-                      <a:r>
-                        <a:rPr sz="800" i="1" baseline="-25000">
-                          <a:latin typeface="Cambria Math"/>
-                        </a:rPr>
-                        <a:t>i</a:t>
-                      </a:r>
-                      <a:r>
-                        <a:rPr sz="800"/>
-                        <a:t> on team </a:t>
-                      </a:r>
-                      <a:r>
-                        <a:rPr sz="800" i="1">
-                          <a:latin typeface="Cambria Math"/>
-                        </a:rPr>
-                        <a:t>j</a:t>
-                      </a:r>
-                      <a:r>
-                        <a:rPr sz="800"/>
-                        <a:t>'s roster after ASSIGN; empirical </a:t>
-                      </a:r>
-                      <a:r>
-                        <a:rPr sz="800" i="1">
-                          <a:latin typeface="Cambria Math"/>
-                        </a:rPr>
-                        <a:t>T</a:t>
-                      </a:r>
-                      <a:r>
-                        <a:rPr sz="800" i="1" baseline="-25000">
-                          <a:latin typeface="Cambria Math"/>
-                        </a:rPr>
-                        <a:t>jt</a:t>
-                      </a:r>
-                      <a:r>
-                        <a:rPr sz="800"/>
-                        <a:t> from </a:t>
-                      </a:r>
-                      <a:r>
-                        <a:rPr sz="800" i="1">
-                          <a:latin typeface="Cambria Math"/>
-                        </a:rPr>
-                        <a:t>\hat{A}</a:t>
-                      </a:r>
-                      <a:r>
-                        <a:rPr sz="800" i="1" baseline="-25000">
-                          <a:latin typeface="Cambria Math"/>
-                        </a:rPr>
-                        <a:t>i</a:t>
+                        <a:t>Mean A_{i} on team j roster after ASSIGN (not T_{j^*})</a:t>
                       </a:r>
                     </a:p>
                   </a:txBody>
                   <a:tcPr anchor="ctr"/>
                 </a:tc>
               </a:tr>
-              <a:tr h="510235">
+              <a:tr h="506577">
                 <a:tc>
                   <a:txBody>
                     <a:bodyPr wrap="square" lIns="50800" rIns="50800" tIns="25400" bIns="25400"/>
                     <a:lstStyle/>
                     <a:p>
                       <a:r>
-                        <a:rPr sz="900" i="1">
-                          <a:latin typeface="Cambria Math"/>
+                        <a:rPr sz="900" b="0" i="0" baseline="0">
+                          <a:latin typeface="Calibri"/>
                         </a:rPr>
-                        <a:t>ρ</a:t>
+                        <a:t>\rho</a:t>
                       </a:r>
                     </a:p>
                   </a:txBody>
@@ -3482,12 +3394,10 @@
                     <a:bodyPr wrap="square" lIns="50800" rIns="50800" tIns="25400" bIns="25400"/>
                     <a:lstStyle/>
                     <a:p>
-                      <a:pPr>
-                        <a:defRPr sz="900">
+                      <a:r>
+                        <a:rPr sz="900" b="0" i="0" baseline="0">
                           <a:latin typeface="Calibri"/>
-                        </a:defRPr>
-                      </a:pPr>
-                      <a:r>
+                        </a:rPr>
                         <a:t>Assignment assortativity</a:t>
                       </a:r>
                     </a:p>
@@ -3500,82 +3410,27 @@
                     <a:lstStyle/>
                     <a:p>
                       <a:r>
-                        <a:rPr sz="800"/>
-                        <a:t>Soft match strength: players </a:t>
-                      </a:r>
-                      <a:r>
-                        <a:rPr sz="800" i="1">
-                          <a:latin typeface="Cambria Math"/>
+                        <a:rPr sz="800" b="0" i="0" baseline="0">
+                          <a:latin typeface="Calibri"/>
                         </a:rPr>
-                        <a:t>\to</a:t>
-                      </a:r>
-                      <a:r>
-                        <a:rPr sz="800"/>
-                        <a:t> teams with </a:t>
-                      </a:r>
-                      <a:r>
-                        <a:rPr sz="800" i="1">
-                          <a:latin typeface="Cambria Math"/>
-                        </a:rPr>
-                        <a:t>T</a:t>
-                      </a:r>
-                      <a:r>
-                        <a:rPr sz="800" i="1" baseline="-25000">
-                          <a:latin typeface="Cambria Math"/>
-                        </a:rPr>
-                        <a:t>j^*</a:t>
-                      </a:r>
-                      <a:r>
-                        <a:rPr sz="800" i="1">
-                          <a:latin typeface="Cambria Math"/>
-                        </a:rPr>
-                        <a:t> ≈ A</a:t>
-                      </a:r>
-                      <a:r>
-                        <a:rPr sz="800" i="1" baseline="-25000">
-                          <a:latin typeface="Cambria Math"/>
-                        </a:rPr>
-                        <a:t>i</a:t>
+                        <a:t>Soft match strength: players \rightarrow teams with T_{j^*} \approx A_{i}</a:t>
                       </a:r>
                     </a:p>
                   </a:txBody>
                   <a:tcPr anchor="ctr"/>
                 </a:tc>
               </a:tr>
-              <a:tr h="510235">
+              <a:tr h="506577">
                 <a:tc>
                   <a:txBody>
                     <a:bodyPr wrap="square" lIns="50800" rIns="50800" tIns="25400" bIns="25400"/>
                     <a:lstStyle/>
                     <a:p>
                       <a:r>
-                        <a:rPr sz="900" i="1">
-                          <a:latin typeface="Cambria Math"/>
+                        <a:rPr sz="900" b="0" i="0" baseline="0">
+                          <a:latin typeface="Calibri"/>
                         </a:rPr>
-                        <a:t>L</a:t>
-                      </a:r>
-                      <a:r>
-                        <a:rPr sz="800" i="1" baseline="-25000">
-                          <a:latin typeface="Cambria Math"/>
-                        </a:rPr>
-                        <a:t>C</a:t>
-                      </a:r>
-                    </a:p>
-                  </a:txBody>
-                  <a:tcPr anchor="ctr"/>
-                </a:tc>
-                <a:tc>
-                  <a:txBody>
-                    <a:bodyPr wrap="square" lIns="50800" rIns="50800" tIns="25400" bIns="25400"/>
-                    <a:lstStyle/>
-                    <a:p>
-                      <a:pPr>
-                        <a:defRPr sz="900">
-                          <a:latin typeface="Calibri"/>
-                        </a:defRPr>
-                      </a:pPr>
-                      <a:r>
-                        <a:t>Congestion measure</a:t>
+                        <a:t>L_C</a:t>
                       </a:r>
                     </a:p>
                   </a:txBody>
@@ -3587,57 +3442,10 @@
                     <a:lstStyle/>
                     <a:p>
                       <a:r>
-                        <a:rPr sz="800"/>
-                        <a:t>LOO peer viability — deck uses smooth </a:t>
-                      </a:r>
-                      <a:r>
-                        <a:rPr sz="800" i="1">
-                          <a:latin typeface="Cambria Math"/>
+                        <a:rPr sz="900" b="0" i="0" baseline="0">
+                          <a:latin typeface="Calibri"/>
                         </a:rPr>
-                        <a:t>σ</a:t>
-                      </a:r>
-                      <a:r>
-                        <a:rPr sz="800"/>
-                        <a:t>; code also has hard share (</a:t>
-                      </a:r>
-                      <a:r>
-                        <a:rPr sz="800" i="1">
-                          <a:latin typeface="Cambria Math"/>
-                        </a:rPr>
-                        <a:t>A</a:t>
-                      </a:r>
-                      <a:r>
-                        <a:rPr sz="800" i="1" baseline="-25000">
-                          <a:latin typeface="Cambria Math"/>
-                        </a:rPr>
-                        <a:t>j</a:t>
-                      </a:r>
-                      <a:r>
-                        <a:rPr sz="800" i="1">
-                          <a:latin typeface="Cambria Math"/>
-                        </a:rPr>
-                        <a:t>&gt;\theta</a:t>
-                      </a:r>
-                      <a:r>
-                        <a:rPr sz="800"/>
-                        <a:t>)</a:t>
-                      </a:r>
-                    </a:p>
-                  </a:txBody>
-                  <a:tcPr anchor="ctr"/>
-                </a:tc>
-              </a:tr>
-              <a:tr h="510235">
-                <a:tc>
-                  <a:txBody>
-                    <a:bodyPr wrap="square" lIns="50800" rIns="50800" tIns="25400" bIns="25400"/>
-                    <a:lstStyle/>
-                    <a:p>
-                      <a:r>
-                        <a:rPr sz="900" i="1">
-                          <a:latin typeface="Cambria Math"/>
-                        </a:rPr>
-                        <a:t>λ</a:t>
+                        <a:t>Team congestion</a:t>
                       </a:r>
                     </a:p>
                   </a:txBody>
@@ -3648,12 +3456,42 @@
                     <a:bodyPr wrap="square" lIns="50800" rIns="50800" tIns="25400" bIns="25400"/>
                     <a:lstStyle/>
                     <a:p>
-                      <a:pPr>
-                        <a:defRPr sz="900">
+                      <a:r>
+                        <a:rPr sz="800" b="0" i="0" baseline="0">
                           <a:latin typeface="Calibri"/>
-                        </a:defRPr>
-                      </a:pPr>
+                        </a:rPr>
+                        <a:t>Team-level mean \sigma(\gamma(A_{j}-\theta)) on roster — same L_C for all players on team j</a:t>
+                      </a:r>
+                    </a:p>
+                  </a:txBody>
+                  <a:tcPr anchor="ctr"/>
+                </a:tc>
+              </a:tr>
+              <a:tr h="506577">
+                <a:tc>
+                  <a:txBody>
+                    <a:bodyPr wrap="square" lIns="50800" rIns="50800" tIns="25400" bIns="25400"/>
+                    <a:lstStyle/>
+                    <a:p>
                       <a:r>
+                        <a:rPr sz="900" b="0" i="0" baseline="0">
+                          <a:latin typeface="Calibri"/>
+                        </a:rPr>
+                        <a:t>\lambda</a:t>
+                      </a:r>
+                    </a:p>
+                  </a:txBody>
+                  <a:tcPr anchor="ctr"/>
+                </a:tc>
+                <a:tc>
+                  <a:txBody>
+                    <a:bodyPr wrap="square" lIns="50800" rIns="50800" tIns="25400" bIns="25400"/>
+                    <a:lstStyle/>
+                    <a:p>
+                      <a:r>
+                        <a:rPr sz="900" b="0" i="0" baseline="0">
+                          <a:latin typeface="Calibri"/>
+                        </a:rPr>
                         <a:t>Congestion weight in score</a:t>
                       </a:r>
                     </a:p>
@@ -3666,39 +3504,25 @@
                     <a:lstStyle/>
                     <a:p>
                       <a:r>
-                        <a:rPr sz="800"/>
-                        <a:t>How hard </a:t>
-                      </a:r>
-                      <a:r>
-                        <a:rPr sz="800" i="1">
-                          <a:latin typeface="Cambria Math"/>
+                        <a:rPr sz="800" b="0" i="0" baseline="0">
+                          <a:latin typeface="Calibri"/>
                         </a:rPr>
-                        <a:t>L</a:t>
-                      </a:r>
-                      <a:r>
-                        <a:rPr sz="800" i="1" baseline="-25000">
-                          <a:latin typeface="Cambria Math"/>
-                        </a:rPr>
-                        <a:t>C</a:t>
-                      </a:r>
-                      <a:r>
-                        <a:rPr sz="800"/>
-                        <a:t> penalizes ranking — not congestion itself</a:t>
+                        <a:t>How hard L_C penalizes ranking — not congestion itself</a:t>
                       </a:r>
                     </a:p>
                   </a:txBody>
                   <a:tcPr anchor="ctr"/>
                 </a:tc>
               </a:tr>
-              <a:tr h="510235">
+              <a:tr h="506577">
                 <a:tc>
                   <a:txBody>
                     <a:bodyPr wrap="square" lIns="50800" rIns="50800" tIns="25400" bIns="25400"/>
                     <a:lstStyle/>
                     <a:p>
                       <a:r>
-                        <a:rPr sz="900" i="1">
-                          <a:latin typeface="Cambria Math"/>
+                        <a:rPr sz="900" b="0" i="0" baseline="0">
+                          <a:latin typeface="Calibri"/>
                         </a:rPr>
                         <a:t>\theta</a:t>
                       </a:r>
@@ -3711,12 +3535,10 @@
                     <a:bodyPr wrap="square" lIns="50800" rIns="50800" tIns="25400" bIns="25400"/>
                     <a:lstStyle/>
                     <a:p>
-                      <a:pPr>
-                        <a:defRPr sz="900">
+                      <a:r>
+                        <a:rPr sz="900" b="0" i="0" baseline="0">
                           <a:latin typeface="Calibri"/>
-                        </a:defRPr>
-                      </a:pPr>
-                      <a:r>
+                        </a:rPr>
                         <a:t>Viability cutline</a:t>
                       </a:r>
                     </a:p>
@@ -3728,28 +3550,26 @@
                     <a:bodyPr wrap="square" lIns="50800" rIns="50800" tIns="25400" bIns="25400"/>
                     <a:lstStyle/>
                     <a:p>
-                      <a:pPr>
-                        <a:defRPr sz="800">
+                      <a:r>
+                        <a:rPr sz="800" b="0" i="0" baseline="0">
                           <a:latin typeface="Calibri"/>
-                        </a:defRPr>
-                      </a:pPr>
-                      <a:r>
-                        <a:t>Center of the sigmoid</a:t>
+                        </a:rPr>
+                        <a:t>Center of the sigmoid (F_A^{-1}(1-K/N) in k_over_n mode)</a:t>
                       </a:r>
                     </a:p>
                   </a:txBody>
                   <a:tcPr anchor="ctr"/>
                 </a:tc>
               </a:tr>
-              <a:tr h="510235">
+              <a:tr h="506577">
                 <a:tc>
                   <a:txBody>
                     <a:bodyPr wrap="square" lIns="50800" rIns="50800" tIns="25400" bIns="25400"/>
                     <a:lstStyle/>
                     <a:p>
                       <a:r>
-                        <a:rPr sz="900" i="1">
-                          <a:latin typeface="Cambria Math"/>
+                        <a:rPr sz="900" b="0" i="0" baseline="0">
+                          <a:latin typeface="Calibri"/>
                         </a:rPr>
                         <a:t>\gamma</a:t>
                       </a:r>
@@ -3762,12 +3582,10 @@
                     <a:bodyPr wrap="square" lIns="50800" rIns="50800" tIns="25400" bIns="25400"/>
                     <a:lstStyle/>
                     <a:p>
-                      <a:pPr>
-                        <a:defRPr sz="900">
+                      <a:r>
+                        <a:rPr sz="900" b="0" i="0" baseline="0">
                           <a:latin typeface="Calibri"/>
-                        </a:defRPr>
-                      </a:pPr>
-                      <a:r>
+                        </a:rPr>
                         <a:t>Sigmoid sharpness</a:t>
                       </a:r>
                     </a:p>
@@ -3780,29 +3598,25 @@
                     <a:lstStyle/>
                     <a:p>
                       <a:r>
-                        <a:rPr sz="800"/>
-                        <a:t>Steepness of viability step around </a:t>
-                      </a:r>
-                      <a:r>
-                        <a:rPr sz="800" i="1">
-                          <a:latin typeface="Cambria Math"/>
+                        <a:rPr sz="800" b="0" i="0" baseline="0">
+                          <a:latin typeface="Calibri"/>
                         </a:rPr>
-                        <a:t>\theta</a:t>
+                        <a:t>Steepness of viability step around \theta</a:t>
                       </a:r>
                     </a:p>
                   </a:txBody>
                   <a:tcPr anchor="ctr"/>
                 </a:tc>
               </a:tr>
-              <a:tr h="510237">
+              <a:tr h="506583">
                 <a:tc>
                   <a:txBody>
                     <a:bodyPr wrap="square" lIns="50800" rIns="50800" tIns="25400" bIns="25400"/>
                     <a:lstStyle/>
                     <a:p>
                       <a:r>
-                        <a:rPr sz="900" i="1">
-                          <a:latin typeface="Cambria Math"/>
+                        <a:rPr sz="900" b="0" i="0" baseline="0">
+                          <a:latin typeface="Calibri"/>
                         </a:rPr>
                         <a:t>K/N</a:t>
                       </a:r>
@@ -3815,12 +3629,10 @@
                     <a:bodyPr wrap="square" lIns="50800" rIns="50800" tIns="25400" bIns="25400"/>
                     <a:lstStyle/>
                     <a:p>
-                      <a:pPr>
-                        <a:defRPr sz="900">
+                      <a:r>
+                        <a:rPr sz="900" b="0" i="0" baseline="0">
                           <a:latin typeface="Calibri"/>
-                        </a:defRPr>
-                      </a:pPr>
-                      <a:r>
+                        </a:rPr>
                         <a:t>Selectivity</a:t>
                       </a:r>
                     </a:p>
@@ -3833,18 +3645,10 @@
                     <a:lstStyle/>
                     <a:p>
                       <a:r>
-                        <a:rPr sz="800"/>
-                        <a:t>Fraction of league selected (</a:t>
-                      </a:r>
-                      <a:r>
-                        <a:rPr sz="800" i="1">
-                          <a:latin typeface="Cambria Math"/>
+                        <a:rPr sz="800" b="0" i="0" baseline="0">
+                          <a:latin typeface="Calibri"/>
                         </a:rPr>
-                        <a:t>K \div N</a:t>
-                      </a:r>
-                      <a:r>
-                        <a:rPr sz="800"/>
-                        <a:t>)</a:t>
+                        <a:t>Fraction of league selected (K \div N)</a:t>
                       </a:r>
                     </a:p>
                   </a:txBody>
@@ -3864,7 +3668,7 @@
         <p:spPr>
           <a:xfrm>
             <a:off x="6446520" y="749808"/>
-            <a:ext cx="5361127" cy="1874519"/>
+            <a:ext cx="5361127" cy="256032"/>
           </a:xfrm>
           <a:prstGeom prst="rect">
             <a:avLst/>
@@ -3872,315 +3676,16 @@
           <a:noFill/>
         </p:spPr>
         <p:txBody>
-          <a:bodyPr wrap="square">
+          <a:bodyPr wrap="none">
             <a:spAutoFit/>
           </a:bodyPr>
           <a:lstStyle/>
           <a:p>
-            <a:pPr>
-              <a:spcBef>
-                <a:spcPts val="0"/>
-              </a:spcBef>
-              <a:spcAft>
-                <a:spcPts val="0"/>
-              </a:spcAft>
-              <a:defRPr b="1"/>
-            </a:pPr>
-            <a:r>
-              <a:rPr sz="900"/>
-              <a:t>Not curve fitting: which rules \emph{bend} synthetic selection curves — not NCAA fit yet.</a:t>
-            </a:r>
-          </a:p>
-          <a:p>
-            <a:pPr>
-              <a:spcBef>
-                <a:spcPts val="0"/>
-              </a:spcBef>
-              <a:spcAft>
-                <a:spcPts val="0"/>
-              </a:spcAft>
-            </a:pPr>
-            <a:r>
-              <a:rPr sz="900"/>
-              <a:t>Three steps: ASSIGN (</a:t>
-            </a:r>
-            <a:r>
-              <a:rPr sz="900" i="1">
-                <a:latin typeface="Cambria Math"/>
+            <a:r>
+              <a:rPr sz="1100" b="1" i="0" baseline="0">
+                <a:latin typeface="Calibri"/>
               </a:rPr>
-              <a:t>ρ</a:t>
-            </a:r>
-            <a:r>
-              <a:rPr sz="900"/>
-              <a:t>) </a:t>
-            </a:r>
-            <a:r>
-              <a:rPr sz="900" i="1">
-                <a:latin typeface="Cambria Math"/>
-              </a:rPr>
-              <a:t>\to</a:t>
-            </a:r>
-            <a:r>
-              <a:rPr sz="900"/>
-              <a:t> SCORE (</a:t>
-            </a:r>
-            <a:r>
-              <a:rPr sz="900" i="1">
-                <a:latin typeface="Cambria Math"/>
-              </a:rPr>
-              <a:t>S</a:t>
-            </a:r>
-            <a:r>
-              <a:rPr sz="800" i="1" baseline="-25000">
-                <a:latin typeface="Cambria Math"/>
-              </a:rPr>
-              <a:t>i</a:t>
-            </a:r>
-            <a:r>
-              <a:rPr sz="900" i="1">
-                <a:latin typeface="Cambria Math"/>
-              </a:rPr>
-              <a:t> = A</a:t>
-            </a:r>
-            <a:r>
-              <a:rPr sz="800" i="1" baseline="-25000">
-                <a:latin typeface="Cambria Math"/>
-              </a:rPr>
-              <a:t>i</a:t>
-            </a:r>
-            <a:r>
-              <a:rPr sz="900" i="1">
-                <a:latin typeface="Cambria Math"/>
-              </a:rPr>
-              <a:t> - λ L</a:t>
-            </a:r>
-            <a:r>
-              <a:rPr sz="800" i="1" baseline="-25000">
-                <a:latin typeface="Cambria Math"/>
-              </a:rPr>
-              <a:t>C</a:t>
-            </a:r>
-            <a:r>
-              <a:rPr sz="900"/>
-              <a:t>) </a:t>
-            </a:r>
-            <a:r>
-              <a:rPr sz="900" i="1">
-                <a:latin typeface="Cambria Math"/>
-              </a:rPr>
-              <a:t>\to</a:t>
-            </a:r>
-            <a:r>
-              <a:rPr sz="900"/>
-              <a:t> SELECT (top-</a:t>
-            </a:r>
-            <a:r>
-              <a:rPr sz="900" i="1">
-                <a:latin typeface="Cambria Math"/>
-              </a:rPr>
-              <a:t>K</a:t>
-            </a:r>
-            <a:r>
-              <a:rPr sz="900"/>
-              <a:t>); then VISUALIZE by pool-mean bin.</a:t>
-            </a:r>
-          </a:p>
-          <a:p>
-            <a:pPr>
-              <a:spcBef>
-                <a:spcPts val="0"/>
-              </a:spcBef>
-              <a:spcAft>
-                <a:spcPts val="0"/>
-              </a:spcAft>
-            </a:pPr>
-            <a:r>
-              <a:rPr sz="900" i="1">
-                <a:latin typeface="Cambria Math"/>
-              </a:rPr>
-              <a:t>L</a:t>
-            </a:r>
-            <a:r>
-              <a:rPr sz="800" i="1" baseline="-25000">
-                <a:latin typeface="Cambria Math"/>
-              </a:rPr>
-              <a:t>C</a:t>
-            </a:r>
-            <a:r>
-              <a:rPr sz="900"/>
-              <a:t> in this deck: \texttt{crowding\_smooth} (mean </a:t>
-            </a:r>
-            <a:r>
-              <a:rPr sz="900" i="1">
-                <a:latin typeface="Cambria Math"/>
-              </a:rPr>
-              <a:t>σ</a:t>
-            </a:r>
-            <a:r>
-              <a:rPr sz="900"/>
-              <a:t>). Code also builds hard </a:t>
-            </a:r>
-            <a:r>
-              <a:rPr sz="900" i="1">
-                <a:latin typeface="Cambria Math"/>
-              </a:rPr>
-              <a:t>L</a:t>
-            </a:r>
-            <a:r>
-              <a:rPr sz="800" i="1" baseline="-25000">
-                <a:latin typeface="Cambria Math"/>
-              </a:rPr>
-              <a:t>C</a:t>
-            </a:r>
-            <a:r>
-              <a:rPr sz="900"/>
-              <a:t> = LOO share with </a:t>
-            </a:r>
-            <a:r>
-              <a:rPr sz="900" i="1">
-                <a:latin typeface="Cambria Math"/>
-              </a:rPr>
-              <a:t>A</a:t>
-            </a:r>
-            <a:r>
-              <a:rPr sz="800" i="1" baseline="-25000">
-                <a:latin typeface="Cambria Math"/>
-              </a:rPr>
-              <a:t>j</a:t>
-            </a:r>
-            <a:r>
-              <a:rPr sz="900" i="1">
-                <a:latin typeface="Cambria Math"/>
-              </a:rPr>
-              <a:t> &gt; \theta</a:t>
-            </a:r>
-            <a:r>
-              <a:rPr sz="900"/>
-              <a:t> — not shown here.</a:t>
-            </a:r>
-          </a:p>
-          <a:p>
-            <a:pPr>
-              <a:spcBef>
-                <a:spcPts val="0"/>
-              </a:spcBef>
-              <a:spcAft>
-                <a:spcPts val="0"/>
-              </a:spcAft>
-            </a:pPr>
-            <a:r>
-              <a:rPr sz="900"/>
-              <a:t>One-at-a-time (OAT): each slide moves one knob; other settings stay at benchmark values.</a:t>
-            </a:r>
-          </a:p>
-          <a:p>
-            <a:pPr>
-              <a:spcBef>
-                <a:spcPts val="0"/>
-              </a:spcBef>
-              <a:spcAft>
-                <a:spcPts val="0"/>
-              </a:spcAft>
-            </a:pPr>
-            <a:r>
-              <a:rPr sz="900"/>
-              <a:t>Seed 42 on stochastic steps: draw </a:t>
-            </a:r>
-            <a:r>
-              <a:rPr sz="900" i="1">
-                <a:latin typeface="Cambria Math"/>
-              </a:rPr>
-              <a:t>A</a:t>
-            </a:r>
-            <a:r>
-              <a:rPr sz="800" i="1" baseline="-25000">
-                <a:latin typeface="Cambria Math"/>
-              </a:rPr>
-              <a:t>i</a:t>
-            </a:r>
-            <a:r>
-              <a:rPr sz="900"/>
-              <a:t>, </a:t>
-            </a:r>
-            <a:r>
-              <a:rPr sz="900" i="1">
-                <a:latin typeface="Cambria Math"/>
-              </a:rPr>
-              <a:t>T</a:t>
-            </a:r>
-            <a:r>
-              <a:rPr sz="800" i="1" baseline="-25000">
-                <a:latin typeface="Cambria Math"/>
-              </a:rPr>
-              <a:t>j^*</a:t>
-            </a:r>
-            <a:r>
-              <a:rPr sz="900"/>
-              <a:t>; soft-</a:t>
-            </a:r>
-            <a:r>
-              <a:rPr sz="900" i="1">
-                <a:latin typeface="Cambria Math"/>
-              </a:rPr>
-              <a:t>ρ</a:t>
-            </a:r>
-            <a:r>
-              <a:rPr sz="900"/>
-              <a:t> assignment. Score, top-</a:t>
-            </a:r>
-            <a:r>
-              <a:rPr sz="900" i="1">
-                <a:latin typeface="Cambria Math"/>
-              </a:rPr>
-              <a:t>K</a:t>
-            </a:r>
-            <a:r>
-              <a:rPr sz="900"/>
-              <a:t>, bins are deterministic.</a:t>
-            </a:r>
-          </a:p>
-          <a:p>
-            <a:pPr>
-              <a:spcBef>
-                <a:spcPts val="0"/>
-              </a:spcBef>
-              <a:spcAft>
-                <a:spcPts val="0"/>
-              </a:spcAft>
-            </a:pPr>
-            <a:r>
-              <a:rPr sz="900"/>
-              <a:t>League: </a:t>
-            </a:r>
-            <a:r>
-              <a:rPr sz="900" i="1">
-                <a:latin typeface="Cambria Math"/>
-              </a:rPr>
-              <a:t>N=5600</a:t>
-            </a:r>
-            <a:r>
-              <a:rPr sz="900"/>
-              <a:t>, </a:t>
-            </a:r>
-            <a:r>
-              <a:rPr sz="900" i="1">
-                <a:latin typeface="Cambria Math"/>
-              </a:rPr>
-              <a:t>K=560</a:t>
-            </a:r>
-            <a:r>
-              <a:rPr sz="900"/>
-              <a:t>, </a:t>
-            </a:r>
-            <a:r>
-              <a:rPr sz="900" i="1">
-                <a:latin typeface="Cambria Math"/>
-              </a:rPr>
-              <a:t>K/N=10%</a:t>
-            </a:r>
-            <a:r>
-              <a:rPr sz="900"/>
-              <a:t> (539 preset).</a:t>
+              <a:t>How to read this deck</a:t>
             </a:r>
           </a:p>
         </p:txBody>
@@ -4193,8 +3698,8 @@
         </p:nvSpPr>
         <p:spPr>
           <a:xfrm>
-            <a:off x="6446520" y="2660903"/>
-            <a:ext cx="5361127" cy="1417320"/>
+            <a:off x="6446520" y="1005840"/>
+            <a:ext cx="5361127" cy="1618487"/>
           </a:xfrm>
           <a:prstGeom prst="rect">
             <a:avLst/>
@@ -4208,211 +3713,86 @@
           <a:lstStyle/>
           <a:p>
             <a:pPr>
-              <a:spcBef>
-                <a:spcPts val="0"/>
-              </a:spcBef>
-              <a:spcAft>
-                <a:spcPts val="0"/>
-              </a:spcAft>
-              <a:defRPr b="1"/>
+              <a:buChar char="•"/>
+              <a:lnSpc>
+                <a:spcPct val="150000"/>
+              </a:lnSpc>
             </a:pPr>
             <a:r>
-              <a:rPr sz="900" i="1">
-                <a:latin typeface="Cambria Math"/>
+              <a:rPr sz="1000" b="0" i="0" baseline="0">
+                <a:latin typeface="Calibri"/>
               </a:rPr>
-              <a:t>A</a:t>
-            </a:r>
-            <a:r>
-              <a:rPr sz="800" i="1" baseline="-25000">
-                <a:latin typeface="Cambria Math"/>
+              <a:t>  Not curve fitting: which rules bend synthetic selection curves — not NCAA fit yet.</a:t>
+            </a:r>
+          </a:p>
+          <a:p>
+            <a:pPr>
+              <a:buChar char="•"/>
+              <a:lnSpc>
+                <a:spcPct val="150000"/>
+              </a:lnSpc>
+            </a:pPr>
+            <a:r>
+              <a:rPr sz="1000" b="0" i="0" baseline="0">
+                <a:latin typeface="Calibri"/>
               </a:rPr>
-              <a:t>i</a:t>
-            </a:r>
-            <a:r>
-              <a:rPr sz="900"/>
-              <a:t>: Beta(2,2) on [0,1] — \texttt{SELECTION\_539\_ABILITY\_DRAW}</a:t>
+              <a:t>  Three steps: ASSIGN (\rho) \rightarrow SCORE (S_i = A_i - \lambda L_C) \rightarrow SELECT (top-K); then VISUALIZE by pool-mean bin.</a:t>
             </a:r>
           </a:p>
           <a:p>
             <a:pPr>
-              <a:spcBef>
-                <a:spcPts val="0"/>
-              </a:spcBef>
-              <a:spcAft>
-                <a:spcPts val="0"/>
-              </a:spcAft>
+              <a:buChar char="•"/>
+              <a:lnSpc>
+                <a:spcPct val="150000"/>
+              </a:lnSpc>
             </a:pPr>
             <a:r>
-              <a:rPr sz="900" i="1">
-                <a:latin typeface="Cambria Math"/>
+              <a:rPr sz="1000" b="0" i="0" baseline="0">
+                <a:latin typeface="Calibri"/>
               </a:rPr>
-              <a:t>T</a:t>
-            </a:r>
-            <a:r>
-              <a:rPr sz="800" i="1" baseline="-25000">
-                <a:latin typeface="Cambria Math"/>
+              <a:t>  L_C in this deck: team smooth (crowding_smooth_team) — mean peer viability over the full roster.</a:t>
+            </a:r>
+          </a:p>
+          <a:p>
+            <a:pPr>
+              <a:buChar char="•"/>
+              <a:lnSpc>
+                <a:spcPct val="150000"/>
+              </a:lnSpc>
+            </a:pPr>
+            <a:r>
+              <a:rPr sz="1000" b="0" i="0" baseline="0">
+                <a:latin typeface="Calibri"/>
               </a:rPr>
-              <a:t>j^*</a:t>
-            </a:r>
-            <a:r>
-              <a:rPr sz="900"/>
-              <a:t>: Uniform[0,1] iid per team — \texttt{draw\_target\_means}; synthetic assignment targets, not NCAA roster data</a:t>
+              <a:t>  One-at-a-time (OAT): each slide moves one knob; other settings stay at benchmark values.</a:t>
             </a:r>
           </a:p>
           <a:p>
             <a:pPr>
-              <a:spcBef>
-                <a:spcPts val="0"/>
-              </a:spcBef>
-              <a:spcAft>
-                <a:spcPts val="0"/>
-              </a:spcAft>
+              <a:buChar char="•"/>
+              <a:lnSpc>
+                <a:spcPct val="150000"/>
+              </a:lnSpc>
             </a:pPr>
             <a:r>
-              <a:rPr sz="900" i="1">
-                <a:latin typeface="Cambria Math"/>
+              <a:rPr sz="1000" b="0" i="0" baseline="0">
+                <a:latin typeface="Calibri"/>
               </a:rPr>
-              <a:t>T</a:t>
-            </a:r>
-            <a:r>
-              <a:rPr sz="800" i="1" baseline="-25000">
-                <a:latin typeface="Cambria Math"/>
+              <a:t>  Seed 42 on stochastic steps: draw A_i, T_{j^*}; soft-\rho assignment. Score, top-K, bins are deterministic.</a:t>
+            </a:r>
+          </a:p>
+          <a:p>
+            <a:pPr>
+              <a:buChar char="•"/>
+              <a:lnSpc>
+                <a:spcPct val="150000"/>
+              </a:lnSpc>
+            </a:pPr>
+            <a:r>
+              <a:rPr sz="1000" b="0" i="0" baseline="0">
+                <a:latin typeface="Calibri"/>
               </a:rPr>
-              <a:t>j</a:t>
-            </a:r>
-            <a:r>
-              <a:rPr sz="900"/>
-              <a:t>: realized roster mean after ASSIGN — not drawn; Sketch A 2D </a:t>
-            </a:r>
-            <a:r>
-              <a:rPr sz="900" i="1">
-                <a:latin typeface="Cambria Math"/>
-              </a:rPr>
-              <a:t>y</a:t>
-            </a:r>
-            <a:r>
-              <a:rPr sz="900"/>
-              <a:t>-axis</a:t>
-            </a:r>
-          </a:p>
-          <a:p>
-            <a:pPr>
-              <a:spcBef>
-                <a:spcPts val="0"/>
-              </a:spcBef>
-              <a:spcAft>
-                <a:spcPts val="0"/>
-              </a:spcAft>
-            </a:pPr>
-            <a:r>
-              <a:rPr sz="900" i="1">
-                <a:latin typeface="Cambria Math"/>
-              </a:rPr>
-              <a:t>λ=0.55</a:t>
-            </a:r>
-            <a:r>
-              <a:rPr sz="900"/>
-              <a:t> — \texttt{tier1\_539\_reference\_settings.json} / playground default</a:t>
-            </a:r>
-          </a:p>
-          <a:p>
-            <a:pPr>
-              <a:spcBef>
-                <a:spcPts val="0"/>
-              </a:spcBef>
-              <a:spcAft>
-                <a:spcPts val="0"/>
-              </a:spcAft>
-            </a:pPr>
-            <a:r>
-              <a:rPr sz="900" i="1">
-                <a:latin typeface="Cambria Math"/>
-              </a:rPr>
-              <a:t>\theta=0.72</a:t>
-            </a:r>
-            <a:r>
-              <a:rPr sz="900"/>
-              <a:t>, </a:t>
-            </a:r>
-            <a:r>
-              <a:rPr sz="900" i="1">
-                <a:latin typeface="Cambria Math"/>
-              </a:rPr>
-              <a:t>\gamma=10</a:t>
-            </a:r>
-            <a:r>
-              <a:rPr sz="900"/>
-              <a:t> — same 539 reference JSON</a:t>
-            </a:r>
-          </a:p>
-          <a:p>
-            <a:pPr>
-              <a:spcBef>
-                <a:spcPts val="0"/>
-              </a:spcBef>
-              <a:spcAft>
-                <a:spcPts val="0"/>
-              </a:spcAft>
-            </a:pPr>
-            <a:r>
-              <a:rPr sz="900" i="1">
-                <a:latin typeface="Cambria Math"/>
-              </a:rPr>
-              <a:t>ρ=8</a:t>
-            </a:r>
-            <a:r>
-              <a:rPr sz="900"/>
-              <a:t> — gallery fixed assign for </a:t>
-            </a:r>
-            <a:r>
-              <a:rPr sz="900" i="1">
-                <a:latin typeface="Cambria Math"/>
-              </a:rPr>
-              <a:t>λ</a:t>
-            </a:r>
-            <a:r>
-              <a:rPr sz="900"/>
-              <a:t> / </a:t>
-            </a:r>
-            <a:r>
-              <a:rPr sz="900" i="1">
-                <a:latin typeface="Cambria Math"/>
-              </a:rPr>
-              <a:t>\theta</a:t>
-            </a:r>
-            <a:r>
-              <a:rPr sz="900"/>
-              <a:t> slides (moderate-high mixing; not a 539 JSON field)</a:t>
-            </a:r>
-          </a:p>
-          <a:p>
-            <a:pPr>
-              <a:spcBef>
-                <a:spcPts val="0"/>
-              </a:spcBef>
-              <a:spcAft>
-                <a:spcPts val="0"/>
-              </a:spcAft>
-            </a:pPr>
-            <a:r>
-              <a:rPr sz="900" i="1">
-                <a:latin typeface="Cambria Math"/>
-              </a:rPr>
-              <a:t>K/N=10%</a:t>
-            </a:r>
-            <a:r>
-              <a:rPr sz="900"/>
-              <a:t> — characterization default (MBB draft </a:t>
-            </a:r>
-            <a:r>
-              <a:rPr sz="900" i="1">
-                <a:latin typeface="Cambria Math"/>
-              </a:rPr>
-              <a:t>≈</a:t>
-            </a:r>
-            <a:r>
-              <a:rPr sz="900"/>
-              <a:t> 1% is a separate calibration point)</a:t>
+              <a:t>  League: N=5600, K=560, K/N=10% (539 preset).</a:t>
             </a:r>
           </a:p>
         </p:txBody>
@@ -4425,8 +3805,8 @@
         </p:nvSpPr>
         <p:spPr>
           <a:xfrm>
-            <a:off x="6446520" y="4114799"/>
-            <a:ext cx="5361127" cy="1975105"/>
+            <a:off x="6446520" y="2660903"/>
+            <a:ext cx="5361127" cy="256032"/>
           </a:xfrm>
           <a:prstGeom prst="rect">
             <a:avLst/>
@@ -4434,51 +3814,16 @@
           <a:noFill/>
         </p:spPr>
         <p:txBody>
-          <a:bodyPr wrap="square">
+          <a:bodyPr wrap="none">
             <a:spAutoFit/>
           </a:bodyPr>
           <a:lstStyle/>
           <a:p>
-            <a:pPr>
-              <a:spcBef>
-                <a:spcPts val="0"/>
-              </a:spcBef>
-              <a:spcAft>
-                <a:spcPts val="0"/>
-              </a:spcAft>
-              <a:defRPr b="1"/>
-            </a:pPr>
-            <a:r>
-              <a:rPr sz="900"/>
-              <a:t>Real hero: draft rate vs \textbf{poolq\_loo} (teammate quality, leave-one-out) — a \textbf{bend} at the top bins.</a:t>
-            </a:r>
-          </a:p>
-          <a:p>
-            <a:pPr>
-              <a:spcBef>
-                <a:spcPts val="0"/>
-              </a:spcBef>
-              <a:spcAft>
-                <a:spcPts val="0"/>
-              </a:spcAft>
-            </a:pPr>
-            <a:r>
-              <a:rPr sz="900"/>
-              <a:t>This deck: fraction selected vs \textbf{pool mean} in a fake league — same \emph{kind} of question, different axis and league.</a:t>
-            </a:r>
-          </a:p>
-          <a:p>
-            <a:pPr>
-              <a:spcBef>
-                <a:spcPts val="0"/>
-              </a:spcBef>
-              <a:spcAft>
-                <a:spcPts val="0"/>
-              </a:spcAft>
-            </a:pPr>
-            <a:r>
-              <a:rPr sz="900"/>
-              <a:t>Benchmarks anchor to the Alex 539 playground track so sim slides stay comparable; we have \textbf{not} re-fit those numbers to NCAA data in Phase B.</a:t>
+            <a:r>
+              <a:rPr sz="1100" b="1" i="0" baseline="0">
+                <a:latin typeface="Calibri"/>
+              </a:rPr>
+              <a:t>Benchmark values (while sweeping other knobs)</a:t>
             </a:r>
           </a:p>
         </p:txBody>
@@ -4491,8 +3836,8 @@
         </p:nvSpPr>
         <p:spPr>
           <a:xfrm>
-            <a:off x="384048" y="6126480"/>
-            <a:ext cx="11423599" cy="347472"/>
+            <a:off x="6446520" y="2916935"/>
+            <a:ext cx="5361127" cy="1161288"/>
           </a:xfrm>
           <a:prstGeom prst="rect">
             <a:avLst/>
@@ -4500,17 +3845,248 @@
           <a:noFill/>
         </p:spPr>
         <p:txBody>
+          <a:bodyPr wrap="square">
+            <a:spAutoFit/>
+          </a:bodyPr>
+          <a:lstStyle/>
+          <a:p>
+            <a:pPr>
+              <a:buChar char="•"/>
+              <a:lnSpc>
+                <a:spcPct val="150000"/>
+              </a:lnSpc>
+            </a:pPr>
+            <a:r>
+              <a:rPr sz="1000" b="0" i="0" baseline="0">
+                <a:latin typeface="Calibri"/>
+              </a:rPr>
+              <a:t>  A_i: Beta(2,2) on [0,1] — SELECTION_539_ABILITY_DRAW</a:t>
+            </a:r>
+          </a:p>
+          <a:p>
+            <a:pPr>
+              <a:buChar char="•"/>
+              <a:lnSpc>
+                <a:spcPct val="150000"/>
+              </a:lnSpc>
+            </a:pPr>
+            <a:r>
+              <a:rPr sz="1000" b="0" i="0" baseline="0">
+                <a:latin typeface="Calibri"/>
+              </a:rPr>
+              <a:t>  T_{j^*}: Uniform[0,1] iid per team — draw_target_means; synthetic targets, not NCAA data</a:t>
+            </a:r>
+          </a:p>
+          <a:p>
+            <a:pPr>
+              <a:buChar char="•"/>
+              <a:lnSpc>
+                <a:spcPct val="150000"/>
+              </a:lnSpc>
+            </a:pPr>
+            <a:r>
+              <a:rPr sz="1000" b="0" i="0" baseline="0">
+                <a:latin typeface="Calibri"/>
+              </a:rPr>
+              <a:t>  T_j: realized roster mean after ASSIGN — not drawn; Sketch A 2D y-axis</a:t>
+            </a:r>
+          </a:p>
+          <a:p>
+            <a:pPr>
+              <a:buChar char="•"/>
+              <a:lnSpc>
+                <a:spcPct val="150000"/>
+              </a:lnSpc>
+            </a:pPr>
+            <a:r>
+              <a:rPr sz="1000" b="0" i="0" baseline="0">
+                <a:latin typeface="Calibri"/>
+              </a:rPr>
+              <a:t>  \lambda=0.55 — tier1_539_reference_settings.json / playground default</a:t>
+            </a:r>
+          </a:p>
+          <a:p>
+            <a:pPr>
+              <a:buChar char="•"/>
+              <a:lnSpc>
+                <a:spcPct val="150000"/>
+              </a:lnSpc>
+            </a:pPr>
+            <a:r>
+              <a:rPr sz="1000" b="0" i="0" baseline="0">
+                <a:latin typeface="Calibri"/>
+              </a:rPr>
+              <a:t>  \theta=0.804 — F_A^{-1}(1-K/N) (naive draft on sim draw)</a:t>
+            </a:r>
+          </a:p>
+          <a:p>
+            <a:pPr>
+              <a:buChar char="•"/>
+              <a:lnSpc>
+                <a:spcPct val="150000"/>
+              </a:lnSpc>
+            </a:pPr>
+            <a:r>
+              <a:rPr sz="1000" b="0" i="0" baseline="0">
+                <a:latin typeface="Calibri"/>
+              </a:rPr>
+              <a:t>  \gamma=10 — 539 placeholder until lock on real rosters</a:t>
+            </a:r>
+          </a:p>
+          <a:p>
+            <a:pPr>
+              <a:buChar char="•"/>
+              <a:lnSpc>
+                <a:spcPct val="150000"/>
+              </a:lnSpc>
+            </a:pPr>
+            <a:r>
+              <a:rPr sz="1000" b="0" i="0" baseline="0">
+                <a:latin typeface="Calibri"/>
+              </a:rPr>
+              <a:t>  \rho=8 — gallery fixed assign for \lambda / \theta slides (moderate-high mixing)</a:t>
+            </a:r>
+          </a:p>
+          <a:p>
+            <a:pPr>
+              <a:buChar char="•"/>
+              <a:lnSpc>
+                <a:spcPct val="150000"/>
+              </a:lnSpc>
+            </a:pPr>
+            <a:r>
+              <a:rPr sz="1000" b="0" i="0" baseline="0">
+                <a:latin typeface="Calibri"/>
+              </a:rPr>
+              <a:t>  K/N=10% — characterization default (MBB draft \approx 1% is a separate calibration point)</a:t>
+            </a:r>
+          </a:p>
+        </p:txBody>
+      </p:sp>
+      <p:sp>
+        <p:nvSpPr>
+          <p:cNvPr id="9" name="TextBox 8"/>
+          <p:cNvSpPr txBox="1"/>
+          <p:nvPr/>
+        </p:nvSpPr>
+        <p:spPr>
+          <a:xfrm>
+            <a:off x="6446520" y="4114799"/>
+            <a:ext cx="5361127" cy="256032"/>
+          </a:xfrm>
+          <a:prstGeom prst="rect">
+            <a:avLst/>
+          </a:prstGeom>
+          <a:noFill/>
+        </p:spPr>
+        <p:txBody>
           <a:bodyPr wrap="none">
             <a:spAutoFit/>
           </a:bodyPr>
           <a:lstStyle/>
           <a:p>
+            <a:r>
+              <a:rPr sz="1100" b="1" i="0" baseline="0">
+                <a:latin typeface="Calibri"/>
+              </a:rPr>
+              <a:t>Empirical data (Layer A) vs this deck (Layer C)</a:t>
+            </a:r>
+          </a:p>
+        </p:txBody>
+      </p:sp>
+      <p:sp>
+        <p:nvSpPr>
+          <p:cNvPr id="10" name="TextBox 9"/>
+          <p:cNvSpPr txBox="1"/>
+          <p:nvPr/>
+        </p:nvSpPr>
+        <p:spPr>
+          <a:xfrm>
+            <a:off x="6446520" y="4370831"/>
+            <a:ext cx="5361127" cy="1682497"/>
+          </a:xfrm>
+          <a:prstGeom prst="rect">
+            <a:avLst/>
+          </a:prstGeom>
+          <a:noFill/>
+        </p:spPr>
+        <p:txBody>
+          <a:bodyPr wrap="square">
+            <a:spAutoFit/>
+          </a:bodyPr>
+          <a:lstStyle/>
+          <a:p>
             <a:pPr>
-              <a:defRPr b="1"/>
+              <a:buChar char="•"/>
+              <a:lnSpc>
+                <a:spcPct val="150000"/>
+              </a:lnSpc>
             </a:pPr>
             <a:r>
-              <a:rPr sz="1100"/>
-              <a:t>Claim: Phase B maps which generative knobs move \emph{who gets selected} — prerequisite before Phase C calibration to the hero.</a:t>
+              <a:rPr sz="1000" b="0" i="0" baseline="0">
+                <a:latin typeface="Calibri"/>
+              </a:rPr>
+              <a:t>  Real hero (Layer A): draft rate vs teammate-quality ventiles — bend at the top bins (Pass A / So_Far_).</a:t>
+            </a:r>
+          </a:p>
+          <a:p>
+            <a:pPr>
+              <a:buChar char="•"/>
+              <a:lnSpc>
+                <a:spcPct val="150000"/>
+              </a:lnSpc>
+            </a:pPr>
+            <a:r>
+              <a:rPr sz="1000" b="0" i="0" baseline="0">
+                <a:latin typeface="Calibri"/>
+              </a:rPr>
+              <a:t>  This deck: fraction selected vs pool mean in a fake league — same kind of question, different axis and league.</a:t>
+            </a:r>
+          </a:p>
+          <a:p>
+            <a:pPr>
+              <a:buChar char="•"/>
+              <a:lnSpc>
+                <a:spcPct val="150000"/>
+              </a:lnSpc>
+            </a:pPr>
+            <a:r>
+              <a:rPr sz="1000" b="0" i="0" baseline="0">
+                <a:latin typeface="Calibri"/>
+              </a:rPr>
+              <a:t>  Benchmarks anchor to the Alex 539 playground track; not re-fit to NCAA data in Phase B.</a:t>
+            </a:r>
+          </a:p>
+        </p:txBody>
+      </p:sp>
+      <p:sp>
+        <p:nvSpPr>
+          <p:cNvPr id="11" name="TextBox 10"/>
+          <p:cNvSpPr txBox="1"/>
+          <p:nvPr/>
+        </p:nvSpPr>
+        <p:spPr>
+          <a:xfrm>
+            <a:off x="384048" y="6089904"/>
+            <a:ext cx="11423599" cy="384048"/>
+          </a:xfrm>
+          <a:prstGeom prst="rect">
+            <a:avLst/>
+          </a:prstGeom>
+          <a:noFill/>
+        </p:spPr>
+        <p:txBody>
+          <a:bodyPr wrap="square">
+            <a:spAutoFit/>
+          </a:bodyPr>
+          <a:lstStyle/>
+          <a:p>
+            <a:pPr algn="l"/>
+            <a:r>
+              <a:rPr sz="1100" b="1" i="0" baseline="0">
+                <a:latin typeface="Calibri"/>
+              </a:rPr>
+              <a:t>Claim: Phase B maps which generative knobs move who gets selected — prerequisite before Phase C calibration to the hero.</a:t>
             </a:r>
           </a:p>
         </p:txBody>
